--- a/units/unit05_fifo/fifo.pptx
+++ b/units/unit05_fifo/fifo.pptx
@@ -14801,8 +14801,8 @@
           </a:p>
         </p:txBody>
       </p:sp>
-      <mc:AlternateContent xmlns:mc="http://schemas.openxmlformats.org/markup-compatibility/2006">
-        <mc:Choice xmlns:a14="http://schemas.microsoft.com/office/drawing/2010/main" Requires="a14">
+      <mc:AlternateContent xmlns:mc="http://schemas.openxmlformats.org/markup-compatibility/2006" xmlns:a14="http://schemas.microsoft.com/office/drawing/2010/main">
+        <mc:Choice Requires="a14">
           <p:sp>
             <p:nvSpPr>
               <p:cNvPr id="3" name="Content Placeholder 2">
@@ -15171,7 +15171,7 @@
             </p:txBody>
           </p:sp>
         </mc:Choice>
-        <mc:Fallback>
+        <mc:Fallback xmlns="">
           <p:sp>
             <p:nvSpPr>
               <p:cNvPr id="3" name="Content Placeholder 2">
@@ -18619,8 +18619,8 @@
           </a:p>
         </p:txBody>
       </p:sp>
-      <mc:AlternateContent xmlns:mc="http://schemas.openxmlformats.org/markup-compatibility/2006">
-        <mc:Choice xmlns:a14="http://schemas.microsoft.com/office/drawing/2010/main" Requires="a14">
+      <mc:AlternateContent xmlns:mc="http://schemas.openxmlformats.org/markup-compatibility/2006" xmlns:a14="http://schemas.microsoft.com/office/drawing/2010/main">
+        <mc:Choice Requires="a14">
           <p:sp>
             <p:nvSpPr>
               <p:cNvPr id="3" name="Content Placeholder 2">
@@ -19098,7 +19098,7 @@
             </p:txBody>
           </p:sp>
         </mc:Choice>
-        <mc:Fallback>
+        <mc:Fallback xmlns="">
           <p:sp>
             <p:nvSpPr>
               <p:cNvPr id="3" name="Content Placeholder 2">
@@ -19818,8 +19818,8 @@
           </a:fontRef>
         </p:style>
       </p:cxnSp>
-      <mc:AlternateContent xmlns:mc="http://schemas.openxmlformats.org/markup-compatibility/2006">
-        <mc:Choice xmlns:a14="http://schemas.microsoft.com/office/drawing/2010/main" Requires="a14">
+      <mc:AlternateContent xmlns:mc="http://schemas.openxmlformats.org/markup-compatibility/2006" xmlns:a14="http://schemas.microsoft.com/office/drawing/2010/main">
+        <mc:Choice Requires="a14">
           <p:sp>
             <p:nvSpPr>
               <p:cNvPr id="19" name="TextBox 18">
@@ -19899,7 +19899,7 @@
             </p:txBody>
           </p:sp>
         </mc:Choice>
-        <mc:Fallback>
+        <mc:Fallback xmlns="">
           <p:sp>
             <p:nvSpPr>
               <p:cNvPr id="19" name="TextBox 18">
@@ -19944,8 +19944,8 @@
           </p:sp>
         </mc:Fallback>
       </mc:AlternateContent>
-      <mc:AlternateContent xmlns:mc="http://schemas.openxmlformats.org/markup-compatibility/2006">
-        <mc:Choice xmlns:a14="http://schemas.microsoft.com/office/drawing/2010/main" Requires="a14">
+      <mc:AlternateContent xmlns:mc="http://schemas.openxmlformats.org/markup-compatibility/2006" xmlns:a14="http://schemas.microsoft.com/office/drawing/2010/main">
+        <mc:Choice Requires="a14">
           <p:sp>
             <p:nvSpPr>
               <p:cNvPr id="20" name="TextBox 19">
@@ -20020,7 +20020,7 @@
             </p:txBody>
           </p:sp>
         </mc:Choice>
-        <mc:Fallback>
+        <mc:Fallback xmlns="">
           <p:sp>
             <p:nvSpPr>
               <p:cNvPr id="20" name="TextBox 19">
@@ -20193,8 +20193,8 @@
           </a:fontRef>
         </p:style>
       </p:cxnSp>
-      <mc:AlternateContent xmlns:mc="http://schemas.openxmlformats.org/markup-compatibility/2006">
-        <mc:Choice xmlns:a14="http://schemas.microsoft.com/office/drawing/2010/main" Requires="a14">
+      <mc:AlternateContent xmlns:mc="http://schemas.openxmlformats.org/markup-compatibility/2006" xmlns:a14="http://schemas.microsoft.com/office/drawing/2010/main">
+        <mc:Choice Requires="a14">
           <p:sp>
             <p:nvSpPr>
               <p:cNvPr id="25" name="TextBox 24">
@@ -20223,7 +20223,6 @@
               </a:bodyPr>
               <a:lstStyle/>
               <a:p>
-                <a:pPr/>
                 <a:r>
                   <a:rPr lang="en-US" sz="1600" dirty="0"/>
                   <a:t>Control </a:t>
@@ -20243,7 +20242,7 @@
             </p:txBody>
           </p:sp>
         </mc:Choice>
-        <mc:Fallback>
+        <mc:Fallback xmlns="">
           <p:sp>
             <p:nvSpPr>
               <p:cNvPr id="25" name="TextBox 24">
@@ -22782,8 +22781,8 @@
           </a:p>
         </p:txBody>
       </p:sp>
-      <mc:AlternateContent xmlns:mc="http://schemas.openxmlformats.org/markup-compatibility/2006">
-        <mc:Choice xmlns:a14="http://schemas.microsoft.com/office/drawing/2010/main" Requires="a14">
+      <mc:AlternateContent xmlns:mc="http://schemas.openxmlformats.org/markup-compatibility/2006" xmlns:a14="http://schemas.microsoft.com/office/drawing/2010/main">
+        <mc:Choice Requires="a14">
           <p:sp>
             <p:nvSpPr>
               <p:cNvPr id="3" name="Content Placeholder 2">
@@ -22927,7 +22926,7 @@
             </p:txBody>
           </p:sp>
         </mc:Choice>
-        <mc:Fallback>
+        <mc:Fallback xmlns="">
           <p:sp>
             <p:nvSpPr>
               <p:cNvPr id="3" name="Content Placeholder 2">
@@ -25646,8 +25645,8 @@
           </a:p>
         </p:txBody>
       </p:sp>
-      <mc:AlternateContent xmlns:mc="http://schemas.openxmlformats.org/markup-compatibility/2006">
-        <mc:Choice xmlns:a14="http://schemas.microsoft.com/office/drawing/2010/main" Requires="a14">
+      <mc:AlternateContent xmlns:mc="http://schemas.openxmlformats.org/markup-compatibility/2006" xmlns:a14="http://schemas.microsoft.com/office/drawing/2010/main">
+        <mc:Choice Requires="a14">
           <p:sp>
             <p:nvSpPr>
               <p:cNvPr id="3" name="Content Placeholder 2">
@@ -25900,7 +25899,7 @@
             </p:txBody>
           </p:sp>
         </mc:Choice>
-        <mc:Fallback>
+        <mc:Fallback xmlns="">
           <p:sp>
             <p:nvSpPr>
               <p:cNvPr id="3" name="Content Placeholder 2">
@@ -30107,8 +30106,8 @@
           </a:p>
         </p:txBody>
       </p:sp>
-      <mc:AlternateContent xmlns:mc="http://schemas.openxmlformats.org/markup-compatibility/2006">
-        <mc:Choice xmlns:a14="http://schemas.microsoft.com/office/drawing/2010/main" Requires="a14">
+      <mc:AlternateContent xmlns:mc="http://schemas.openxmlformats.org/markup-compatibility/2006" xmlns:a14="http://schemas.microsoft.com/office/drawing/2010/main">
+        <mc:Choice Requires="a14">
           <p:sp>
             <p:nvSpPr>
               <p:cNvPr id="3" name="Content Placeholder 2">
@@ -30545,7 +30544,7 @@
             </p:txBody>
           </p:sp>
         </mc:Choice>
-        <mc:Fallback>
+        <mc:Fallback xmlns="">
           <p:sp>
             <p:nvSpPr>
               <p:cNvPr id="3" name="Content Placeholder 2">
@@ -31238,7 +31237,6 @@
           </a:bodyPr>
           <a:lstStyle/>
           <a:p>
-            <a:pPr/>
             <a:r>
               <a:rPr lang="en-US" sz="1400" dirty="0"/>
               <a:t>Input stream</a:t>
@@ -31274,7 +31272,6 @@
           </a:bodyPr>
           <a:lstStyle/>
           <a:p>
-            <a:pPr/>
             <a:r>
               <a:rPr lang="en-US" sz="1400" dirty="0"/>
               <a:t>Output stream</a:t>
@@ -31828,8 +31825,8 @@
           </a:fontRef>
         </p:style>
       </p:cxnSp>
-      <mc:AlternateContent xmlns:mc="http://schemas.openxmlformats.org/markup-compatibility/2006">
-        <mc:Choice xmlns:a14="http://schemas.microsoft.com/office/drawing/2010/main" Requires="a14">
+      <mc:AlternateContent xmlns:mc="http://schemas.openxmlformats.org/markup-compatibility/2006" xmlns:a14="http://schemas.microsoft.com/office/drawing/2010/main">
+        <mc:Choice Requires="a14">
           <p:sp>
             <p:nvSpPr>
               <p:cNvPr id="18" name="TextBox 17">
@@ -31858,6 +31855,7 @@
               </a:bodyPr>
               <a:lstStyle/>
               <a:p>
+                <a:pPr/>
                 <a14:m>
                   <m:oMathPara xmlns:m="http://schemas.openxmlformats.org/officeDocument/2006/math">
                     <m:oMathParaPr>
@@ -31927,7 +31925,7 @@
             </p:txBody>
           </p:sp>
         </mc:Choice>
-        <mc:Fallback>
+        <mc:Fallback xmlns="">
           <p:sp>
             <p:nvSpPr>
               <p:cNvPr id="18" name="TextBox 17">
@@ -32748,8 +32746,8 @@
           </a:fontRef>
         </p:style>
       </p:cxnSp>
-      <mc:AlternateContent xmlns:mc="http://schemas.openxmlformats.org/markup-compatibility/2006">
-        <mc:Choice xmlns:a14="http://schemas.microsoft.com/office/drawing/2010/main" Requires="a14">
+      <mc:AlternateContent xmlns:mc="http://schemas.openxmlformats.org/markup-compatibility/2006" xmlns:a14="http://schemas.microsoft.com/office/drawing/2010/main">
+        <mc:Choice Requires="a14">
           <p:sp>
             <p:nvSpPr>
               <p:cNvPr id="18" name="TextBox 17">
@@ -32778,6 +32776,7 @@
               </a:bodyPr>
               <a:lstStyle/>
               <a:p>
+                <a:pPr/>
                 <a14:m>
                   <m:oMathPara xmlns:m="http://schemas.openxmlformats.org/officeDocument/2006/math">
                     <m:oMathParaPr>
@@ -32847,7 +32846,7 @@
             </p:txBody>
           </p:sp>
         </mc:Choice>
-        <mc:Fallback>
+        <mc:Fallback xmlns="">
           <p:sp>
             <p:nvSpPr>
               <p:cNvPr id="18" name="TextBox 17">
